--- a/2025013540-arbitrage_matrix_pruning_pre.pptx
+++ b/2025013540-arbitrage_matrix_pruning_pre.pptx
@@ -3287,6 +3287,71 @@
               <a:ea typeface="Aptos"/>
               <a:cs typeface="Aptos"/>
             </a:endParaRPr>
+          </a:p>
+        </p:txBody>
+      </p:sp>
+      <p:pic>
+        <p:nvPicPr>
+          <p:cNvPr id="24" name="图片 23">
+            <a:extLst>
+              <a:ext uri="{FF2B5EF4-FFF2-40B4-BE49-F238E27FC236}">
+                <a16:creationId xmlns:a16="http://schemas.microsoft.com/office/drawing/2014/main" id="{910C1ED4-1142-5F2A-7E8D-E13CB43BC045}"/>
+              </a:ext>
+            </a:extLst>
+          </p:cNvPr>
+          <p:cNvPicPr>
+            <a:picLocks noChangeAspect="1"/>
+          </p:cNvPicPr>
+          <p:nvPr/>
+        </p:nvPicPr>
+        <p:blipFill>
+          <a:blip r:embed="rId4"/>
+          <a:stretch>
+            <a:fillRect/>
+          </a:stretch>
+        </p:blipFill>
+        <p:spPr>
+          <a:xfrm>
+            <a:off x="9315450" y="1678658"/>
+            <a:ext cx="2007519" cy="1933166"/>
+          </a:xfrm>
+          <a:prstGeom prst="rect">
+            <a:avLst/>
+          </a:prstGeom>
+        </p:spPr>
+      </p:pic>
+      <p:sp>
+        <p:nvSpPr>
+          <p:cNvPr id="26" name="文本框 25">
+            <a:extLst>
+              <a:ext uri="{FF2B5EF4-FFF2-40B4-BE49-F238E27FC236}">
+                <a16:creationId xmlns:a16="http://schemas.microsoft.com/office/drawing/2014/main" id="{1242A16B-7B34-436B-DEBC-4AA86CD41C02}"/>
+              </a:ext>
+            </a:extLst>
+          </p:cNvPr>
+          <p:cNvSpPr txBox="1"/>
+          <p:nvPr/>
+        </p:nvSpPr>
+        <p:spPr>
+          <a:xfrm>
+            <a:off x="6096000" y="3577177"/>
+            <a:ext cx="6096000" cy="369332"/>
+          </a:xfrm>
+          <a:prstGeom prst="rect">
+            <a:avLst/>
+          </a:prstGeom>
+          <a:noFill/>
+        </p:spPr>
+        <p:txBody>
+          <a:bodyPr wrap="square">
+            <a:spAutoFit/>
+          </a:bodyPr>
+          <a:lstStyle/>
+          <a:p>
+            <a:r>
+              <a:rPr lang="zh-CN" altLang="en-US" dirty="0"/>
+              <a:t>https://github.com/SamuelWsy/GraphTheoryProject</a:t>
+            </a:r>
           </a:p>
         </p:txBody>
       </p:sp>
@@ -9101,8 +9166,8 @@
           </a:p>
         </p:txBody>
       </p:sp>
-      <mc:AlternateContent xmlns:mc="http://schemas.openxmlformats.org/markup-compatibility/2006">
-        <mc:Choice xmlns:a14="http://schemas.microsoft.com/office/drawing/2010/main" Requires="a14">
+      <mc:AlternateContent xmlns:mc="http://schemas.openxmlformats.org/markup-compatibility/2006" xmlns:a14="http://schemas.microsoft.com/office/drawing/2010/main">
+        <mc:Choice Requires="a14">
           <p:sp>
             <p:nvSpPr>
               <p:cNvPr id="5" name="矩形 4">
@@ -9235,7 +9300,7 @@
             </p:txBody>
           </p:sp>
         </mc:Choice>
-        <mc:Fallback>
+        <mc:Fallback xmlns="">
           <p:sp>
             <p:nvSpPr>
               <p:cNvPr id="5" name="矩形 4">
@@ -10246,8 +10311,8 @@
           </a:ln>
         </p:spPr>
       </p:sp>
-      <mc:AlternateContent xmlns:mc="http://schemas.openxmlformats.org/markup-compatibility/2006">
-        <mc:Choice xmlns:a14="http://schemas.microsoft.com/office/drawing/2010/main" Requires="a14">
+      <mc:AlternateContent xmlns:mc="http://schemas.openxmlformats.org/markup-compatibility/2006" xmlns:a14="http://schemas.microsoft.com/office/drawing/2010/main">
+        <mc:Choice Requires="a14">
           <p:sp>
             <p:nvSpPr>
               <p:cNvPr id="15" name="矩形 14">
@@ -10529,7 +10594,7 @@
             </p:txBody>
           </p:sp>
         </mc:Choice>
-        <mc:Fallback>
+        <mc:Fallback xmlns="">
           <p:sp>
             <p:nvSpPr>
               <p:cNvPr id="15" name="矩形 14">
@@ -22008,8 +22073,8 @@
           </a:ln>
         </p:spPr>
       </p:sp>
-      <mc:AlternateContent xmlns:mc="http://schemas.openxmlformats.org/markup-compatibility/2006">
-        <mc:Choice xmlns:a14="http://schemas.microsoft.com/office/drawing/2010/main" Requires="a14">
+      <mc:AlternateContent xmlns:mc="http://schemas.openxmlformats.org/markup-compatibility/2006" xmlns:a14="http://schemas.microsoft.com/office/drawing/2010/main">
+        <mc:Choice Requires="a14">
           <p:sp>
             <p:nvSpPr>
               <p:cNvPr id="12" name="矩形 11">
@@ -22423,7 +22488,7 @@
             </p:txBody>
           </p:sp>
         </mc:Choice>
-        <mc:Fallback>
+        <mc:Fallback xmlns="">
           <p:sp>
             <p:nvSpPr>
               <p:cNvPr id="12" name="矩形 11">
